--- a/test/fixtures/image.pptx
+++ b/test/fixtures/image.pptx
@@ -4,7 +4,7 @@
 </file>
 
 <file path=ppt/slides/slide1.xml><?xml version="1.0" encoding="utf-8"?>
-<p:sld xmlns:p="http://schemas.openxmlformats.org/presentationml/2006/main" xmlns:a="http://schemas.openxmlformats.org/drawingml/2006/main" xmlns:r="http://schemas.openxmlformats.org/officeDocument/2006/relationships">
+<p:sld xmlns:p="http://schemas.openxmlformats.org/presentationml/2006/main" xmlns:a="http://schemas.openxmlformats.org/drawingml/2006/main" xmlns:r="http://schemas.openxmlformats.org/officeDocument/2006/relationships" xmlns:c="http://schemas.openxmlformats.org/drawingml/2006/chart">
   <p:cSld>
     <p:spTree>
       <p:sp>

--- a/test/fixtures/image.pptx
+++ b/test/fixtures/image.pptx
@@ -36,7 +36,9 @@
         </p:txBody>
       </p:sp>
       <p:pic>
-        <p:nvPicPr/>
+        <p:nvPicPr>
+          <p:cNvPr id="4" name="Picture 2" descr="system diagram"/>
+        </p:nvPicPr>
         <p:blipFill>
           <a:blip r:embed="rId9"/>
         </p:blipFill>
